--- a/에너지경제학/자원에너지경제학_Chapter_6 (원자력).pptx
+++ b/에너지경제학/자원에너지경제학_Chapter_6 (원자력).pptx
@@ -267,7 +267,7 @@
           <a:p>
             <a:fld id="{4A5E00EF-AEA4-43E2-9451-8F9C59A39471}" type="datetimeFigureOut">
               <a:rPr lang="ko-KR" altLang="en-US" smtClean="0"/>
-              <a:t>2026-08-28</a:t>
+              <a:t>2026-09-18</a:t>
             </a:fld>
             <a:endParaRPr lang="ko-KR" altLang="en-US"/>
           </a:p>
@@ -689,7 +689,7 @@
           <a:p>
             <a:fld id="{CD32C56F-BD27-4999-9E6D-D4EACE3DA9F4}" type="datetime1">
               <a:rPr lang="ko-KR" altLang="en-US" smtClean="0"/>
-              <a:t>2026-08-28</a:t>
+              <a:t>2026-09-18</a:t>
             </a:fld>
             <a:endParaRPr lang="ko-KR" altLang="en-US"/>
           </a:p>
@@ -903,7 +903,7 @@
           <a:p>
             <a:fld id="{8EF4A19C-72C8-45CA-8E3F-68A7FA345D6C}" type="datetime1">
               <a:rPr lang="ko-KR" altLang="en-US" smtClean="0"/>
-              <a:t>2026-08-28</a:t>
+              <a:t>2026-09-18</a:t>
             </a:fld>
             <a:endParaRPr lang="ko-KR" altLang="en-US"/>
           </a:p>
@@ -1127,7 +1127,7 @@
           <a:p>
             <a:fld id="{56A175B2-010B-4341-954C-5F8F5C70B124}" type="datetime1">
               <a:rPr lang="ko-KR" altLang="en-US" smtClean="0"/>
-              <a:t>2026-08-28</a:t>
+              <a:t>2026-09-18</a:t>
             </a:fld>
             <a:endParaRPr lang="ko-KR" altLang="en-US"/>
           </a:p>
@@ -1341,7 +1341,7 @@
           <a:p>
             <a:fld id="{16B83F9E-22C9-45CA-9E85-070F1D3EF530}" type="datetime1">
               <a:rPr lang="ko-KR" altLang="en-US" smtClean="0"/>
-              <a:t>2026-08-28</a:t>
+              <a:t>2026-09-18</a:t>
             </a:fld>
             <a:endParaRPr lang="ko-KR" altLang="en-US"/>
           </a:p>
@@ -1632,7 +1632,7 @@
           <a:p>
             <a:fld id="{03278F45-FB3C-4C4D-B89A-7BC3F5F229F6}" type="datetime1">
               <a:rPr lang="ko-KR" altLang="en-US" smtClean="0"/>
-              <a:t>2026-08-28</a:t>
+              <a:t>2026-09-18</a:t>
             </a:fld>
             <a:endParaRPr lang="ko-KR" altLang="en-US"/>
           </a:p>
@@ -2025,7 +2025,7 @@
           <a:p>
             <a:fld id="{38FDAC3C-35A6-415C-9F03-738A6AC328B1}" type="datetime1">
               <a:rPr lang="ko-KR" altLang="en-US" smtClean="0"/>
-              <a:t>2026-08-28</a:t>
+              <a:t>2026-09-18</a:t>
             </a:fld>
             <a:endParaRPr lang="ko-KR" altLang="en-US"/>
           </a:p>
@@ -3619,7 +3619,7 @@
           <a:p>
             <a:fld id="{507A0DF1-AEE6-4B0D-89D2-351E7B3EF65C}" type="datetime1">
               <a:rPr lang="ko-KR" altLang="en-US" smtClean="0"/>
-              <a:t>2026-08-28</a:t>
+              <a:t>2026-09-18</a:t>
             </a:fld>
             <a:endParaRPr lang="ko-KR" altLang="en-US"/>
           </a:p>
@@ -4047,7 +4047,7 @@
           <a:p>
             <a:fld id="{CA93B8C9-630F-4D57-944D-04FD37CECCD3}" type="datetime1">
               <a:rPr lang="ko-KR" altLang="en-US" smtClean="0"/>
-              <a:t>2026-08-28</a:t>
+              <a:t>2026-09-18</a:t>
             </a:fld>
             <a:endParaRPr lang="ko-KR" altLang="en-US"/>
           </a:p>
@@ -4204,7 +4204,7 @@
           <a:p>
             <a:fld id="{E986165A-AC43-4902-9541-874ECD310BA3}" type="datetime1">
               <a:rPr lang="ko-KR" altLang="en-US" smtClean="0"/>
-              <a:t>2026-08-28</a:t>
+              <a:t>2026-09-18</a:t>
             </a:fld>
             <a:endParaRPr lang="ko-KR" altLang="en-US"/>
           </a:p>
@@ -4531,7 +4531,7 @@
           <a:p>
             <a:fld id="{47E6EE6D-2B0E-43A9-87A2-7354CDB998F4}" type="datetime1">
               <a:rPr lang="ko-KR" altLang="en-US" smtClean="0"/>
-              <a:t>2026-08-28</a:t>
+              <a:t>2026-09-18</a:t>
             </a:fld>
             <a:endParaRPr lang="ko-KR" altLang="en-US"/>
           </a:p>
@@ -4835,7 +4835,7 @@
           <a:p>
             <a:fld id="{5CC5944E-0BC8-4FAA-9F94-6B4B05834E10}" type="datetime1">
               <a:rPr lang="ko-KR" altLang="en-US" smtClean="0"/>
-              <a:t>2026-08-28</a:t>
+              <a:t>2026-09-18</a:t>
             </a:fld>
             <a:endParaRPr lang="ko-KR" altLang="en-US"/>
           </a:p>
@@ -29067,55 +29067,6 @@
             <a:r>
               <a:rPr lang="en-US" altLang="ko-KR" sz="1600" dirty="0"/>
               <a:t>.</a:t>
-            </a:r>
-          </a:p>
-        </p:txBody>
-      </p:sp>
-      <p:sp>
-        <p:nvSpPr>
-          <p:cNvPr id="5" name="타원 4">
-            <a:extLst>
-              <a:ext uri="{FF2B5EF4-FFF2-40B4-BE49-F238E27FC236}">
-                <a16:creationId xmlns:a16="http://schemas.microsoft.com/office/drawing/2014/main" id="{3CC43EAD-8281-2F4D-FE1B-685DC5AE09BF}"/>
-              </a:ext>
-            </a:extLst>
-          </p:cNvPr>
-          <p:cNvSpPr/>
-          <p:nvPr/>
-        </p:nvSpPr>
-        <p:spPr>
-          <a:xfrm>
-            <a:off x="-1578547" y="1360557"/>
-            <a:ext cx="2363304" cy="2363304"/>
-          </a:xfrm>
-          <a:prstGeom prst="ellipse">
-            <a:avLst/>
-          </a:prstGeom>
-        </p:spPr>
-        <p:style>
-          <a:lnRef idx="2">
-            <a:schemeClr val="accent1">
-              <a:shade val="15000"/>
-            </a:schemeClr>
-          </a:lnRef>
-          <a:fillRef idx="1">
-            <a:schemeClr val="accent1"/>
-          </a:fillRef>
-          <a:effectRef idx="0">
-            <a:schemeClr val="accent1"/>
-          </a:effectRef>
-          <a:fontRef idx="minor">
-            <a:schemeClr val="lt1"/>
-          </a:fontRef>
-        </p:style>
-        <p:txBody>
-          <a:bodyPr rtlCol="0" anchor="ctr"/>
-          <a:lstStyle/>
-          <a:p>
-            <a:pPr algn="ctr"/>
-            <a:r>
-              <a:rPr lang="ko-KR" altLang="en-US" dirty="0"/>
-              <a:t>태양의 핵분열과 비교설명</a:t>
             </a:r>
           </a:p>
         </p:txBody>
